--- a/assets/figures-editable/c1-c2/c1-e06.pptx
+++ b/assets/figures-editable/c1-c2/c1-e06.pptx
@@ -7,7 +7,7 @@
   <p:sldIdLst>
     <p:sldId id="256" r:id="rId7"/>
   </p:sldIdLst>
-  <p:sldSz cx="11948160" cy="7924799" type="screen4x3"/>
+  <p:sldSz cx="12191695" cy="6858000" type="screen4x3"/>
   <p:notesSz cx="6858000" cy="9144000"/>
   <p:defaultTextStyle>
     <a:defPPr>
@@ -3098,14 +3098,14 @@
       <p:grpSpPr/>
       <p:sp>
         <p:nvSpPr>
-          <p:cNvPr id="2" name="text1" descr="sci-ppt:C1-E06-001"/>
+          <p:cNvPr id="2" name="C1-E06 text 0" descr="sci-ppt:o000"/>
           <p:cNvSpPr txBox="1"/>
           <p:nvPr/>
         </p:nvSpPr>
         <p:spPr>
           <a:xfrm>
-            <a:off x="316992" y="268224"/>
-            <a:ext cx="11277600" cy="359054"/>
+            <a:off x="274320" y="118872"/>
+            <a:ext cx="11612880" cy="340105"/>
           </a:xfrm>
           <a:prstGeom prst="rect">
             <a:avLst/>
@@ -3114,7 +3114,7 @@
           <a:effectLst/>
         </p:spPr>
         <p:txBody>
-          <a:bodyPr wrap="none" lIns="27432" rIns="27432" tIns="18288" bIns="18288" anchor="ctr">
+          <a:bodyPr wrap="none" lIns="18288" rIns="18288" tIns="18288" bIns="18288" anchor="t">
             <a:spAutoFit/>
           </a:bodyPr>
           <a:lstStyle/>
@@ -3125,37 +3125,125 @@
               </a:spcAft>
             </a:pPr>
             <a:r>
-              <a:rPr sz="1823" b="0" i="0">
+              <a:rPr sz="1900" b="1" i="0">
                 <a:solidFill>
                   <a:srgbClr val="8EDBD4"/>
                 </a:solidFill>
                 <a:latin typeface="Arial"/>
               </a:rPr>
-              <a:t>C1-E06 | Physical-variable diagram</a:t>
-            </a:r>
-          </a:p>
-        </p:txBody>
-      </p:sp>
-      <p:sp>
-        <p:nvSpPr>
-          <p:cNvPr id="3" name="ellipse2" descr="sci-ppt:C1-E06-002"/>
+              <a:t>C1-E06 · Newtonian stress and capillary boundary condition</a:t>
+            </a:r>
+          </a:p>
+        </p:txBody>
+      </p:sp>
+      <p:sp>
+        <p:nvSpPr>
+          <p:cNvPr id="3" name="C1-E06 round_rect 1" descr="sci-ppt:o001"/>
           <p:cNvSpPr/>
           <p:nvPr/>
         </p:nvSpPr>
         <p:spPr>
           <a:xfrm>
-            <a:off x="2072640" y="1402080"/>
-            <a:ext cx="2438400" cy="2438400"/>
+            <a:off x="365760" y="914400"/>
+            <a:ext cx="4023360" cy="4846320"/>
+          </a:xfrm>
+          <a:prstGeom prst="roundRect">
+            <a:avLst/>
+          </a:prstGeom>
+          <a:solidFill>
+            <a:srgbClr val="1E4A5A"/>
+          </a:solidFill>
+          <a:ln w="19050">
+            <a:solidFill>
+              <a:srgbClr val="2B6678"/>
+            </a:solidFill>
+          </a:ln>
+          <a:effectLst/>
+        </p:spPr>
+        <p:txBody>
+          <a:bodyPr rtlCol="0" anchor="ctr"/>
+          <a:lstStyle/>
+          <a:p>
+            <a:pPr algn="ctr"/>
+          </a:p>
+        </p:txBody>
+      </p:sp>
+      <p:sp>
+        <p:nvSpPr>
+          <p:cNvPr id="4" name="C1-E06 text 2" descr="sci-ppt:o002"/>
+          <p:cNvSpPr txBox="1"/>
+          <p:nvPr/>
+        </p:nvSpPr>
+        <p:spPr>
+          <a:xfrm>
+            <a:off x="502920" y="978408"/>
+            <a:ext cx="3749039" cy="464057"/>
+          </a:xfrm>
+          <a:prstGeom prst="rect">
+            <a:avLst/>
+          </a:prstGeom>
+          <a:noFill/>
+          <a:effectLst/>
+        </p:spPr>
+        <p:txBody>
+          <a:bodyPr wrap="none" lIns="18288" rIns="18288" tIns="18288" bIns="18288" anchor="t">
+            <a:spAutoFit/>
+          </a:bodyPr>
+          <a:lstStyle/>
+          <a:p>
+            <a:pPr algn="l">
+              <a:spcAft>
+                <a:spcPts val="0"/>
+              </a:spcAft>
+            </a:pPr>
+            <a:r>
+              <a:rPr sz="1350" b="1" i="0">
+                <a:solidFill>
+                  <a:srgbClr val="8EDBD4"/>
+                </a:solidFill>
+                <a:latin typeface="Arial"/>
+              </a:rPr>
+              <a:t>Stresses on the wall of a collapsing</a:t>
+            </a:r>
+          </a:p>
+          <a:p>
+            <a:pPr algn="l">
+              <a:spcAft>
+                <a:spcPts val="0"/>
+              </a:spcAft>
+            </a:pPr>
+            <a:r>
+              <a:rPr sz="1350" b="1" i="0">
+                <a:solidFill>
+                  <a:srgbClr val="8EDBD4"/>
+                </a:solidFill>
+                <a:latin typeface="Arial"/>
+              </a:rPr>
+              <a:t>bubble</a:t>
+            </a:r>
+          </a:p>
+        </p:txBody>
+      </p:sp>
+      <p:sp>
+        <p:nvSpPr>
+          <p:cNvPr id="5" name="C1-E06 ellipse 3" descr="sci-ppt:o003"/>
+          <p:cNvSpPr/>
+          <p:nvPr/>
+        </p:nvSpPr>
+        <p:spPr>
+          <a:xfrm>
+            <a:off x="1371600" y="2286000"/>
+            <a:ext cx="1828800" cy="1828800"/>
           </a:xfrm>
           <a:prstGeom prst="ellipse">
             <a:avLst/>
           </a:prstGeom>
           <a:solidFill>
-            <a:srgbClr val="213E4B"/>
+            <a:srgbClr val="0C1820"/>
           </a:solidFill>
-          <a:ln w="21590">
+          <a:ln w="27940">
             <a:solidFill>
-              <a:srgbClr val="B4C7D2"/>
+              <a:srgbClr val="F2B880"/>
             </a:solidFill>
           </a:ln>
           <a:effectLst/>
@@ -3168,21 +3256,125 @@
           </a:p>
         </p:txBody>
       </p:sp>
+      <p:sp>
+        <p:nvSpPr>
+          <p:cNvPr id="6" name="C1-E06 text 4" descr="sci-ppt:o004"/>
+          <p:cNvSpPr txBox="1"/>
+          <p:nvPr/>
+        </p:nvSpPr>
+        <p:spPr>
+          <a:xfrm>
+            <a:off x="1737360" y="3090672"/>
+            <a:ext cx="1097280" cy="262636"/>
+          </a:xfrm>
+          <a:prstGeom prst="rect">
+            <a:avLst/>
+          </a:prstGeom>
+          <a:noFill/>
+          <a:effectLst/>
+        </p:spPr>
+        <p:txBody>
+          <a:bodyPr wrap="none" lIns="18288" rIns="18288" tIns="18288" bIns="18288" anchor="t">
+            <a:spAutoFit/>
+          </a:bodyPr>
+          <a:lstStyle/>
+          <a:p>
+            <a:pPr algn="ctr">
+              <a:spcAft>
+                <a:spcPts val="0"/>
+              </a:spcAft>
+            </a:pPr>
+            <a:r>
+              <a:rPr sz="1400" b="1" i="0">
+                <a:solidFill>
+                  <a:srgbClr val="F2B880"/>
+                </a:solidFill>
+                <a:latin typeface="Arial"/>
+              </a:rPr>
+              <a:t>p_b</a:t>
+            </a:r>
+          </a:p>
+        </p:txBody>
+      </p:sp>
       <p:cxnSp>
         <p:nvCxnSpPr>
-          <p:cNvPr id="4" name="arrow3" descr="sci-ppt:C1-E06-003"/>
+          <p:cNvPr id="7" name="C1-E06 arrow 5" descr="sci-ppt:o005"/>
           <p:cNvCxnSpPr/>
           <p:nvPr/>
         </p:nvCxnSpPr>
         <p:spPr>
-          <a:xfrm>
-            <a:off x="3291840" y="2621280"/>
-            <a:ext cx="1219200" cy="0"/>
+          <a:xfrm flipV="1">
+            <a:off x="2636235" y="2583246"/>
+            <a:ext cx="385259" cy="323271"/>
           </a:xfrm>
           <a:prstGeom prst="line">
             <a:avLst/>
           </a:prstGeom>
-          <a:ln w="25400">
+          <a:ln w="35560">
+            <a:solidFill>
+              <a:srgbClr val="F2B880"/>
+            </a:solidFill>
+            <a:headEnd type="none" w="med" len="med"/>
+            <a:tailEnd type="triangle" w="med" len="med"/>
+          </a:ln>
+          <a:effectLst/>
+        </p:spPr>
+      </p:cxnSp>
+      <p:sp>
+        <p:nvSpPr>
+          <p:cNvPr id="8" name="C1-E06 text 6" descr="sci-ppt:o006"/>
+          <p:cNvSpPr txBox="1"/>
+          <p:nvPr/>
+        </p:nvSpPr>
+        <p:spPr>
+          <a:xfrm>
+            <a:off x="3148998" y="1944530"/>
+            <a:ext cx="1005840" cy="247142"/>
+          </a:xfrm>
+          <a:prstGeom prst="rect">
+            <a:avLst/>
+          </a:prstGeom>
+          <a:noFill/>
+          <a:effectLst/>
+        </p:spPr>
+        <p:txBody>
+          <a:bodyPr wrap="none" lIns="18288" rIns="18288" tIns="18288" bIns="18288" anchor="t">
+            <a:spAutoFit/>
+          </a:bodyPr>
+          <a:lstStyle/>
+          <a:p>
+            <a:pPr algn="ctr">
+              <a:spcAft>
+                <a:spcPts val="0"/>
+              </a:spcAft>
+            </a:pPr>
+            <a:r>
+              <a:rPr sz="1300" b="1" i="0">
+                <a:solidFill>
+                  <a:srgbClr val="F2B880"/>
+                </a:solidFill>
+                <a:latin typeface="Arial"/>
+              </a:rPr>
+              <a:t>p_b</a:t>
+            </a:r>
+          </a:p>
+        </p:txBody>
+      </p:sp>
+      <p:cxnSp>
+        <p:nvCxnSpPr>
+          <p:cNvPr id="9" name="C1-E06 arrow 7" descr="sci-ppt:o007"/>
+          <p:cNvCxnSpPr/>
+          <p:nvPr/>
+        </p:nvCxnSpPr>
+        <p:spPr>
+          <a:xfrm>
+            <a:off x="1165246" y="2259976"/>
+            <a:ext cx="406273" cy="340903"/>
+          </a:xfrm>
+          <a:prstGeom prst="line">
+            <a:avLst/>
+          </a:prstGeom>
+          <a:ln w="35560">
             <a:solidFill>
               <a:srgbClr val="8EDBD4"/>
             </a:solidFill>
@@ -3194,14 +3386,14 @@
       </p:cxnSp>
       <p:sp>
         <p:nvSpPr>
-          <p:cNvPr id="5" name="text4" descr="sci-ppt:C1-E06-004"/>
+          <p:cNvPr id="10" name="C1-E06 text 8" descr="sci-ppt:o008"/>
           <p:cNvSpPr txBox="1"/>
           <p:nvPr/>
         </p:nvSpPr>
         <p:spPr>
           <a:xfrm>
-            <a:off x="3474720" y="2133600"/>
-            <a:ext cx="1584960" cy="396849"/>
+            <a:off x="417161" y="1944530"/>
+            <a:ext cx="1005840" cy="247142"/>
           </a:xfrm>
           <a:prstGeom prst="rect">
             <a:avLst/>
@@ -3210,7 +3402,175 @@
           <a:effectLst/>
         </p:spPr>
         <p:txBody>
-          <a:bodyPr wrap="none" lIns="27432" rIns="27432" tIns="18288" bIns="18288" anchor="ctr">
+          <a:bodyPr wrap="none" lIns="18288" rIns="18288" tIns="18288" bIns="18288" anchor="t">
+            <a:spAutoFit/>
+          </a:bodyPr>
+          <a:lstStyle/>
+          <a:p>
+            <a:pPr algn="ctr">
+              <a:spcAft>
+                <a:spcPts val="0"/>
+              </a:spcAft>
+            </a:pPr>
+            <a:r>
+              <a:rPr sz="1300" b="1" i="0">
+                <a:solidFill>
+                  <a:srgbClr val="8EDBD4"/>
+                </a:solidFill>
+                <a:latin typeface="Arial"/>
+              </a:rPr>
+              <a:t>pₗ</a:t>
+            </a:r>
+          </a:p>
+        </p:txBody>
+      </p:sp>
+      <p:cxnSp>
+        <p:nvCxnSpPr>
+          <p:cNvPr id="11" name="C1-E06 arrow 9" descr="sci-ppt:o009"/>
+          <p:cNvCxnSpPr/>
+          <p:nvPr/>
+        </p:nvCxnSpPr>
+        <p:spPr>
+          <a:xfrm flipV="1">
+            <a:off x="1165246" y="3799920"/>
+            <a:ext cx="406273" cy="340903"/>
+          </a:xfrm>
+          <a:prstGeom prst="line">
+            <a:avLst/>
+          </a:prstGeom>
+          <a:ln w="35560">
+            <a:solidFill>
+              <a:srgbClr val="F28BA0"/>
+            </a:solidFill>
+            <a:headEnd type="none" w="med" len="med"/>
+            <a:tailEnd type="triangle" w="med" len="med"/>
+          </a:ln>
+          <a:effectLst/>
+        </p:spPr>
+      </p:cxnSp>
+      <p:sp>
+        <p:nvSpPr>
+          <p:cNvPr id="12" name="C1-E06 text 10" descr="sci-ppt:o010"/>
+          <p:cNvSpPr txBox="1"/>
+          <p:nvPr/>
+        </p:nvSpPr>
+        <p:spPr>
+          <a:xfrm>
+            <a:off x="417161" y="4236813"/>
+            <a:ext cx="1005840" cy="247142"/>
+          </a:xfrm>
+          <a:prstGeom prst="rect">
+            <a:avLst/>
+          </a:prstGeom>
+          <a:noFill/>
+          <a:effectLst/>
+        </p:spPr>
+        <p:txBody>
+          <a:bodyPr wrap="none" lIns="18288" rIns="18288" tIns="18288" bIns="18288" anchor="t">
+            <a:spAutoFit/>
+          </a:bodyPr>
+          <a:lstStyle/>
+          <a:p>
+            <a:pPr algn="ctr">
+              <a:spcAft>
+                <a:spcPts val="0"/>
+              </a:spcAft>
+            </a:pPr>
+            <a:r>
+              <a:rPr sz="1300" b="1" i="0">
+                <a:solidFill>
+                  <a:srgbClr val="F28BA0"/>
+                </a:solidFill>
+                <a:latin typeface="Arial"/>
+              </a:rPr>
+              <a:t>2σ/R</a:t>
+            </a:r>
+          </a:p>
+        </p:txBody>
+      </p:sp>
+      <p:cxnSp>
+        <p:nvCxnSpPr>
+          <p:cNvPr id="13" name="C1-E06 arrow 11" descr="sci-ppt:o011"/>
+          <p:cNvCxnSpPr/>
+          <p:nvPr/>
+        </p:nvCxnSpPr>
+        <p:spPr>
+          <a:xfrm flipH="1" flipV="1">
+            <a:off x="3000480" y="3799920"/>
+            <a:ext cx="406273" cy="340903"/>
+          </a:xfrm>
+          <a:prstGeom prst="line">
+            <a:avLst/>
+          </a:prstGeom>
+          <a:ln w="35560">
+            <a:solidFill>
+              <a:srgbClr val="7FC8F8"/>
+            </a:solidFill>
+            <a:headEnd type="none" w="med" len="med"/>
+            <a:tailEnd type="triangle" w="med" len="med"/>
+          </a:ln>
+          <a:effectLst/>
+        </p:spPr>
+      </p:cxnSp>
+      <p:sp>
+        <p:nvSpPr>
+          <p:cNvPr id="14" name="C1-E06 text 12" descr="sci-ppt:o012"/>
+          <p:cNvSpPr txBox="1"/>
+          <p:nvPr/>
+        </p:nvSpPr>
+        <p:spPr>
+          <a:xfrm>
+            <a:off x="3148998" y="4236813"/>
+            <a:ext cx="1005840" cy="247142"/>
+          </a:xfrm>
+          <a:prstGeom prst="rect">
+            <a:avLst/>
+          </a:prstGeom>
+          <a:noFill/>
+          <a:effectLst/>
+        </p:spPr>
+        <p:txBody>
+          <a:bodyPr wrap="none" lIns="18288" rIns="18288" tIns="18288" bIns="18288" anchor="t">
+            <a:spAutoFit/>
+          </a:bodyPr>
+          <a:lstStyle/>
+          <a:p>
+            <a:pPr algn="ctr">
+              <a:spcAft>
+                <a:spcPts val="0"/>
+              </a:spcAft>
+            </a:pPr>
+            <a:r>
+              <a:rPr sz="1300" b="1" i="0">
+                <a:solidFill>
+                  <a:srgbClr val="7FC8F8"/>
+                </a:solidFill>
+                <a:latin typeface="Arial"/>
+              </a:rPr>
+              <a:t>4μṘ/R</a:t>
+            </a:r>
+          </a:p>
+        </p:txBody>
+      </p:sp>
+      <p:sp>
+        <p:nvSpPr>
+          <p:cNvPr id="15" name="C1-E06 text 13" descr="sci-ppt:o013"/>
+          <p:cNvSpPr txBox="1"/>
+          <p:nvPr/>
+        </p:nvSpPr>
+        <p:spPr>
+          <a:xfrm>
+            <a:off x="502920" y="4754880"/>
+            <a:ext cx="3749039" cy="626745"/>
+          </a:xfrm>
+          <a:prstGeom prst="rect">
+            <a:avLst/>
+          </a:prstGeom>
+          <a:noFill/>
+          <a:effectLst/>
+        </p:spPr>
+        <p:txBody>
+          <a:bodyPr wrap="none" lIns="18288" rIns="18288" tIns="18288" bIns="18288" anchor="t">
             <a:spAutoFit/>
           </a:bodyPr>
           <a:lstStyle/>
@@ -3221,27 +3581,147 @@
               </a:spcAft>
             </a:pPr>
             <a:r>
-              <a:rPr sz="2016" b="0" i="0">
+              <a:rPr sz="1250" b="0" i="0">
                 <a:solidFill>
                   <a:srgbClr val="E7F0F3"/>
                 </a:solidFill>
                 <a:latin typeface="Arial"/>
               </a:rPr>
-              <a:t>R(t)</a:t>
-            </a:r>
-          </a:p>
-        </p:txBody>
-      </p:sp>
-      <p:sp>
-        <p:nvSpPr>
-          <p:cNvPr id="6" name="text5" descr="sci-ppt:C1-E06-005"/>
+              <a:t>Gas pushes out; tension pulls in; viscosity</a:t>
+            </a:r>
+          </a:p>
+          <a:p>
+            <a:pPr algn="l">
+              <a:spcAft>
+                <a:spcPts val="0"/>
+              </a:spcAft>
+            </a:pPr>
+            <a:r>
+              <a:rPr sz="1250" b="0" i="0">
+                <a:solidFill>
+                  <a:srgbClr val="E7F0F3"/>
+                </a:solidFill>
+                <a:latin typeface="Arial"/>
+              </a:rPr>
+              <a:t>resists the strain rate ∂u/∂r = −2Ṙ/R at the</a:t>
+            </a:r>
+          </a:p>
+          <a:p>
+            <a:pPr algn="l">
+              <a:spcAft>
+                <a:spcPts val="0"/>
+              </a:spcAft>
+            </a:pPr>
+            <a:r>
+              <a:rPr sz="1250" b="0" i="0">
+                <a:solidFill>
+                  <a:srgbClr val="E7F0F3"/>
+                </a:solidFill>
+                <a:latin typeface="Arial"/>
+              </a:rPr>
+              <a:t>wall.</a:t>
+            </a:r>
+          </a:p>
+        </p:txBody>
+      </p:sp>
+      <p:cxnSp>
+        <p:nvCxnSpPr>
+          <p:cNvPr id="16" name="C1-E06 line 14" descr="sci-ppt:o014"/>
+          <p:cNvCxnSpPr/>
+          <p:nvPr/>
+        </p:nvCxnSpPr>
+        <p:spPr>
+          <a:xfrm>
+            <a:off x="5394960" y="5303520"/>
+            <a:ext cx="6309360" cy="0"/>
+          </a:xfrm>
+          <a:prstGeom prst="line">
+            <a:avLst/>
+          </a:prstGeom>
+          <a:ln w="19050">
+            <a:solidFill>
+              <a:srgbClr val="B4C7D2"/>
+            </a:solidFill>
+          </a:ln>
+          <a:effectLst/>
+        </p:spPr>
+      </p:cxnSp>
+      <p:cxnSp>
+        <p:nvCxnSpPr>
+          <p:cNvPr id="17" name="C1-E06 line 15" descr="sci-ppt:o015"/>
+          <p:cNvCxnSpPr/>
+          <p:nvPr/>
+        </p:nvCxnSpPr>
+        <p:spPr>
+          <a:xfrm>
+            <a:off x="5394960" y="1371600"/>
+            <a:ext cx="0" cy="3931920"/>
+          </a:xfrm>
+          <a:prstGeom prst="line">
+            <a:avLst/>
+          </a:prstGeom>
+          <a:ln w="19050">
+            <a:solidFill>
+              <a:srgbClr val="B4C7D2"/>
+            </a:solidFill>
+          </a:ln>
+          <a:effectLst/>
+        </p:spPr>
+      </p:cxnSp>
+      <p:cxnSp>
+        <p:nvCxnSpPr>
+          <p:cNvPr id="18" name="C1-E06 line 16" descr="sci-ppt:o016"/>
+          <p:cNvCxnSpPr/>
+          <p:nvPr/>
+        </p:nvCxnSpPr>
+        <p:spPr>
+          <a:xfrm>
+            <a:off x="5330952" y="5303520"/>
+            <a:ext cx="64008" cy="0"/>
+          </a:xfrm>
+          <a:prstGeom prst="line">
+            <a:avLst/>
+          </a:prstGeom>
+          <a:ln w="12700">
+            <a:solidFill>
+              <a:srgbClr val="B4C7D2"/>
+            </a:solidFill>
+          </a:ln>
+          <a:effectLst/>
+        </p:spPr>
+      </p:cxnSp>
+      <p:cxnSp>
+        <p:nvCxnSpPr>
+          <p:cNvPr id="19" name="C1-E06 line 17" descr="sci-ppt:o017"/>
+          <p:cNvCxnSpPr/>
+          <p:nvPr/>
+        </p:nvCxnSpPr>
+        <p:spPr>
+          <a:xfrm>
+            <a:off x="5394960" y="5303520"/>
+            <a:ext cx="6309360" cy="0"/>
+          </a:xfrm>
+          <a:prstGeom prst="line">
+            <a:avLst/>
+          </a:prstGeom>
+          <a:ln w="7620">
+            <a:solidFill>
+              <a:srgbClr val="2E4756"/>
+            </a:solidFill>
+          </a:ln>
+          <a:effectLst/>
+        </p:spPr>
+      </p:cxnSp>
+      <p:sp>
+        <p:nvSpPr>
+          <p:cNvPr id="20" name="C1-E06 text 18" descr="sci-ppt:o018"/>
           <p:cNvSpPr txBox="1"/>
           <p:nvPr/>
         </p:nvSpPr>
         <p:spPr>
           <a:xfrm>
-            <a:off x="2682240" y="2804160"/>
-            <a:ext cx="2194560" cy="377952"/>
+            <a:off x="4526280" y="5221224"/>
+            <a:ext cx="777240" cy="208407"/>
           </a:xfrm>
           <a:prstGeom prst="rect">
             <a:avLst/>
@@ -3250,7 +3730,299 @@
           <a:effectLst/>
         </p:spPr>
         <p:txBody>
-          <a:bodyPr wrap="none" lIns="27432" rIns="27432" tIns="18288" bIns="18288" anchor="ctr">
+          <a:bodyPr wrap="none" lIns="18288" rIns="18288" tIns="18288" bIns="18288" anchor="t">
+            <a:spAutoFit/>
+          </a:bodyPr>
+          <a:lstStyle/>
+          <a:p>
+            <a:pPr algn="r">
+              <a:spcAft>
+                <a:spcPts val="0"/>
+              </a:spcAft>
+            </a:pPr>
+            <a:r>
+              <a:rPr sz="1050" b="0" i="0">
+                <a:solidFill>
+                  <a:srgbClr val="B4C7D2"/>
+                </a:solidFill>
+                <a:latin typeface="Arial"/>
+              </a:rPr>
+              <a:t>0</a:t>
+            </a:r>
+          </a:p>
+        </p:txBody>
+      </p:sp>
+      <p:cxnSp>
+        <p:nvCxnSpPr>
+          <p:cNvPr id="21" name="C1-E06 line 19" descr="sci-ppt:o019"/>
+          <p:cNvCxnSpPr/>
+          <p:nvPr/>
+        </p:nvCxnSpPr>
+        <p:spPr>
+          <a:xfrm>
+            <a:off x="5330952" y="4180114"/>
+            <a:ext cx="64008" cy="0"/>
+          </a:xfrm>
+          <a:prstGeom prst="line">
+            <a:avLst/>
+          </a:prstGeom>
+          <a:ln w="12700">
+            <a:solidFill>
+              <a:srgbClr val="B4C7D2"/>
+            </a:solidFill>
+          </a:ln>
+          <a:effectLst/>
+        </p:spPr>
+      </p:cxnSp>
+      <p:cxnSp>
+        <p:nvCxnSpPr>
+          <p:cNvPr id="22" name="C1-E06 line 20" descr="sci-ppt:o020"/>
+          <p:cNvCxnSpPr/>
+          <p:nvPr/>
+        </p:nvCxnSpPr>
+        <p:spPr>
+          <a:xfrm>
+            <a:off x="5394960" y="4180114"/>
+            <a:ext cx="6309360" cy="0"/>
+          </a:xfrm>
+          <a:prstGeom prst="line">
+            <a:avLst/>
+          </a:prstGeom>
+          <a:ln w="7620">
+            <a:solidFill>
+              <a:srgbClr val="2E4756"/>
+            </a:solidFill>
+          </a:ln>
+          <a:effectLst/>
+        </p:spPr>
+      </p:cxnSp>
+      <p:sp>
+        <p:nvSpPr>
+          <p:cNvPr id="23" name="C1-E06 text 21" descr="sci-ppt:o021"/>
+          <p:cNvSpPr txBox="1"/>
+          <p:nvPr/>
+        </p:nvSpPr>
+        <p:spPr>
+          <a:xfrm>
+            <a:off x="4526280" y="4097818"/>
+            <a:ext cx="777240" cy="208407"/>
+          </a:xfrm>
+          <a:prstGeom prst="rect">
+            <a:avLst/>
+          </a:prstGeom>
+          <a:noFill/>
+          <a:effectLst/>
+        </p:spPr>
+        <p:txBody>
+          <a:bodyPr wrap="none" lIns="18288" rIns="18288" tIns="18288" bIns="18288" anchor="t">
+            <a:spAutoFit/>
+          </a:bodyPr>
+          <a:lstStyle/>
+          <a:p>
+            <a:pPr algn="r">
+              <a:spcAft>
+                <a:spcPts val="0"/>
+              </a:spcAft>
+            </a:pPr>
+            <a:r>
+              <a:rPr sz="1050" b="0" i="0">
+                <a:solidFill>
+                  <a:srgbClr val="B4C7D2"/>
+                </a:solidFill>
+                <a:latin typeface="Arial"/>
+              </a:rPr>
+              <a:t>40</a:t>
+            </a:r>
+          </a:p>
+        </p:txBody>
+      </p:sp>
+      <p:cxnSp>
+        <p:nvCxnSpPr>
+          <p:cNvPr id="24" name="C1-E06 line 22" descr="sci-ppt:o022"/>
+          <p:cNvCxnSpPr/>
+          <p:nvPr/>
+        </p:nvCxnSpPr>
+        <p:spPr>
+          <a:xfrm>
+            <a:off x="5330952" y="3056708"/>
+            <a:ext cx="64008" cy="0"/>
+          </a:xfrm>
+          <a:prstGeom prst="line">
+            <a:avLst/>
+          </a:prstGeom>
+          <a:ln w="12700">
+            <a:solidFill>
+              <a:srgbClr val="B4C7D2"/>
+            </a:solidFill>
+          </a:ln>
+          <a:effectLst/>
+        </p:spPr>
+      </p:cxnSp>
+      <p:cxnSp>
+        <p:nvCxnSpPr>
+          <p:cNvPr id="25" name="C1-E06 line 23" descr="sci-ppt:o023"/>
+          <p:cNvCxnSpPr/>
+          <p:nvPr/>
+        </p:nvCxnSpPr>
+        <p:spPr>
+          <a:xfrm>
+            <a:off x="5394960" y="3056708"/>
+            <a:ext cx="6309360" cy="0"/>
+          </a:xfrm>
+          <a:prstGeom prst="line">
+            <a:avLst/>
+          </a:prstGeom>
+          <a:ln w="7620">
+            <a:solidFill>
+              <a:srgbClr val="2E4756"/>
+            </a:solidFill>
+          </a:ln>
+          <a:effectLst/>
+        </p:spPr>
+      </p:cxnSp>
+      <p:sp>
+        <p:nvSpPr>
+          <p:cNvPr id="26" name="C1-E06 text 24" descr="sci-ppt:o024"/>
+          <p:cNvSpPr txBox="1"/>
+          <p:nvPr/>
+        </p:nvSpPr>
+        <p:spPr>
+          <a:xfrm>
+            <a:off x="4526280" y="2974412"/>
+            <a:ext cx="777240" cy="208407"/>
+          </a:xfrm>
+          <a:prstGeom prst="rect">
+            <a:avLst/>
+          </a:prstGeom>
+          <a:noFill/>
+          <a:effectLst/>
+        </p:spPr>
+        <p:txBody>
+          <a:bodyPr wrap="none" lIns="18288" rIns="18288" tIns="18288" bIns="18288" anchor="t">
+            <a:spAutoFit/>
+          </a:bodyPr>
+          <a:lstStyle/>
+          <a:p>
+            <a:pPr algn="r">
+              <a:spcAft>
+                <a:spcPts val="0"/>
+              </a:spcAft>
+            </a:pPr>
+            <a:r>
+              <a:rPr sz="1050" b="0" i="0">
+                <a:solidFill>
+                  <a:srgbClr val="B4C7D2"/>
+                </a:solidFill>
+                <a:latin typeface="Arial"/>
+              </a:rPr>
+              <a:t>80</a:t>
+            </a:r>
+          </a:p>
+        </p:txBody>
+      </p:sp>
+      <p:cxnSp>
+        <p:nvCxnSpPr>
+          <p:cNvPr id="27" name="C1-E06 line 25" descr="sci-ppt:o025"/>
+          <p:cNvCxnSpPr/>
+          <p:nvPr/>
+        </p:nvCxnSpPr>
+        <p:spPr>
+          <a:xfrm>
+            <a:off x="5330952" y="1933302"/>
+            <a:ext cx="64008" cy="0"/>
+          </a:xfrm>
+          <a:prstGeom prst="line">
+            <a:avLst/>
+          </a:prstGeom>
+          <a:ln w="12700">
+            <a:solidFill>
+              <a:srgbClr val="B4C7D2"/>
+            </a:solidFill>
+          </a:ln>
+          <a:effectLst/>
+        </p:spPr>
+      </p:cxnSp>
+      <p:cxnSp>
+        <p:nvCxnSpPr>
+          <p:cNvPr id="28" name="C1-E06 line 26" descr="sci-ppt:o026"/>
+          <p:cNvCxnSpPr/>
+          <p:nvPr/>
+        </p:nvCxnSpPr>
+        <p:spPr>
+          <a:xfrm>
+            <a:off x="5394960" y="1933302"/>
+            <a:ext cx="6309360" cy="0"/>
+          </a:xfrm>
+          <a:prstGeom prst="line">
+            <a:avLst/>
+          </a:prstGeom>
+          <a:ln w="7620">
+            <a:solidFill>
+              <a:srgbClr val="2E4756"/>
+            </a:solidFill>
+          </a:ln>
+          <a:effectLst/>
+        </p:spPr>
+      </p:cxnSp>
+      <p:sp>
+        <p:nvSpPr>
+          <p:cNvPr id="29" name="C1-E06 text 27" descr="sci-ppt:o027"/>
+          <p:cNvSpPr txBox="1"/>
+          <p:nvPr/>
+        </p:nvSpPr>
+        <p:spPr>
+          <a:xfrm>
+            <a:off x="4526280" y="1851006"/>
+            <a:ext cx="777240" cy="208407"/>
+          </a:xfrm>
+          <a:prstGeom prst="rect">
+            <a:avLst/>
+          </a:prstGeom>
+          <a:noFill/>
+          <a:effectLst/>
+        </p:spPr>
+        <p:txBody>
+          <a:bodyPr wrap="none" lIns="18288" rIns="18288" tIns="18288" bIns="18288" anchor="t">
+            <a:spAutoFit/>
+          </a:bodyPr>
+          <a:lstStyle/>
+          <a:p>
+            <a:pPr algn="r">
+              <a:spcAft>
+                <a:spcPts val="0"/>
+              </a:spcAft>
+            </a:pPr>
+            <a:r>
+              <a:rPr sz="1050" b="0" i="0">
+                <a:solidFill>
+                  <a:srgbClr val="B4C7D2"/>
+                </a:solidFill>
+                <a:latin typeface="Arial"/>
+              </a:rPr>
+              <a:t>120</a:t>
+            </a:r>
+          </a:p>
+        </p:txBody>
+      </p:sp>
+      <p:sp>
+        <p:nvSpPr>
+          <p:cNvPr id="30" name="C1-E06 text 28" descr="sci-ppt:o028"/>
+          <p:cNvSpPr txBox="1"/>
+          <p:nvPr/>
+        </p:nvSpPr>
+        <p:spPr>
+          <a:xfrm>
+            <a:off x="4846320" y="1024128"/>
+            <a:ext cx="6309360" cy="231648"/>
+          </a:xfrm>
+          <a:prstGeom prst="rect">
+            <a:avLst/>
+          </a:prstGeom>
+          <a:noFill/>
+          <a:effectLst/>
+        </p:spPr>
+        <p:txBody>
+          <a:bodyPr wrap="none" lIns="18288" rIns="18288" tIns="18288" bIns="18288" anchor="t">
             <a:spAutoFit/>
           </a:bodyPr>
           <a:lstStyle/>
@@ -3261,27 +4033,63 @@
               </a:spcAft>
             </a:pPr>
             <a:r>
-              <a:rPr sz="1920" b="0" i="0">
+              <a:rPr sz="1200" b="0" i="0">
                 <a:solidFill>
                   <a:srgbClr val="E7F0F3"/>
                 </a:solidFill>
                 <a:latin typeface="Arial"/>
               </a:rPr>
-              <a:t>p_b</a:t>
-            </a:r>
-          </a:p>
-        </p:txBody>
-      </p:sp>
-      <p:sp>
-        <p:nvSpPr>
-          <p:cNvPr id="7" name="text6" descr="sci-ppt:C1-E06-006"/>
+              <a:t>pressure (kPa)</a:t>
+            </a:r>
+          </a:p>
+        </p:txBody>
+      </p:sp>
+      <p:sp>
+        <p:nvSpPr>
+          <p:cNvPr id="31" name="C1-E06 rect 29" descr="sci-ppt:o029"/>
+          <p:cNvSpPr/>
+          <p:nvPr/>
+        </p:nvSpPr>
+        <p:spPr>
+          <a:xfrm>
+            <a:off x="5584240" y="1933302"/>
+            <a:ext cx="1198778" cy="3370217"/>
+          </a:xfrm>
+          <a:prstGeom prst="rect">
+            <a:avLst/>
+          </a:prstGeom>
+          <a:solidFill>
+            <a:srgbClr val="F2B880">
+              <a:alpha val="85000"/>
+            </a:srgbClr>
+          </a:solidFill>
+          <a:ln w="12700">
+            <a:solidFill>
+              <a:srgbClr val="F2B880">
+                <a:alpha val="85000"/>
+              </a:srgbClr>
+            </a:solidFill>
+          </a:ln>
+          <a:effectLst/>
+        </p:spPr>
+        <p:txBody>
+          <a:bodyPr rtlCol="0" anchor="ctr"/>
+          <a:lstStyle/>
+          <a:p>
+            <a:pPr algn="ctr"/>
+          </a:p>
+        </p:txBody>
+      </p:sp>
+      <p:sp>
+        <p:nvSpPr>
+          <p:cNvPr id="32" name="C1-E06 text 30" descr="sci-ppt:o030"/>
           <p:cNvSpPr txBox="1"/>
           <p:nvPr/>
         </p:nvSpPr>
         <p:spPr>
           <a:xfrm>
-            <a:off x="5242560" y="1524000"/>
-            <a:ext cx="4876800" cy="415747"/>
+            <a:off x="5309920" y="1640694"/>
+            <a:ext cx="1280160" cy="223900"/>
           </a:xfrm>
           <a:prstGeom prst="rect">
             <a:avLst/>
@@ -3290,7 +4098,275 @@
           <a:effectLst/>
         </p:spPr>
         <p:txBody>
-          <a:bodyPr wrap="none" lIns="27432" rIns="27432" tIns="18288" bIns="18288" anchor="ctr">
+          <a:bodyPr wrap="none" lIns="18288" rIns="18288" tIns="18288" bIns="18288" anchor="t">
+            <a:spAutoFit/>
+          </a:bodyPr>
+          <a:lstStyle/>
+          <a:p>
+            <a:pPr algn="ctr">
+              <a:spcAft>
+                <a:spcPts val="0"/>
+              </a:spcAft>
+            </a:pPr>
+            <a:r>
+              <a:rPr sz="1150" b="0" i="0">
+                <a:solidFill>
+                  <a:srgbClr val="E7F0F3"/>
+                </a:solidFill>
+                <a:latin typeface="Arial"/>
+              </a:rPr>
+              <a:t>p_b = 120</a:t>
+            </a:r>
+          </a:p>
+        </p:txBody>
+      </p:sp>
+      <p:sp>
+        <p:nvSpPr>
+          <p:cNvPr id="33" name="C1-E06 rect 31" descr="sci-ppt:o031"/>
+          <p:cNvSpPr/>
+          <p:nvPr/>
+        </p:nvSpPr>
+        <p:spPr>
+          <a:xfrm>
+            <a:off x="7161580" y="1933302"/>
+            <a:ext cx="1198778" cy="404426"/>
+          </a:xfrm>
+          <a:prstGeom prst="rect">
+            <a:avLst/>
+          </a:prstGeom>
+          <a:solidFill>
+            <a:srgbClr val="F28BA0">
+              <a:alpha val="85000"/>
+            </a:srgbClr>
+          </a:solidFill>
+          <a:ln w="12700">
+            <a:solidFill>
+              <a:srgbClr val="F28BA0">
+                <a:alpha val="85000"/>
+              </a:srgbClr>
+            </a:solidFill>
+          </a:ln>
+          <a:effectLst/>
+        </p:spPr>
+        <p:txBody>
+          <a:bodyPr rtlCol="0" anchor="ctr"/>
+          <a:lstStyle/>
+          <a:p>
+            <a:pPr algn="ctr"/>
+          </a:p>
+        </p:txBody>
+      </p:sp>
+      <p:sp>
+        <p:nvSpPr>
+          <p:cNvPr id="34" name="C1-E06 text 32" descr="sci-ppt:o032"/>
+          <p:cNvSpPr txBox="1"/>
+          <p:nvPr/>
+        </p:nvSpPr>
+        <p:spPr>
+          <a:xfrm>
+            <a:off x="6887260" y="1640694"/>
+            <a:ext cx="1280160" cy="223900"/>
+          </a:xfrm>
+          <a:prstGeom prst="rect">
+            <a:avLst/>
+          </a:prstGeom>
+          <a:noFill/>
+          <a:effectLst/>
+        </p:spPr>
+        <p:txBody>
+          <a:bodyPr wrap="none" lIns="18288" rIns="18288" tIns="18288" bIns="18288" anchor="t">
+            <a:spAutoFit/>
+          </a:bodyPr>
+          <a:lstStyle/>
+          <a:p>
+            <a:pPr algn="ctr">
+              <a:spcAft>
+                <a:spcPts val="0"/>
+              </a:spcAft>
+            </a:pPr>
+            <a:r>
+              <a:rPr sz="1150" b="0" i="0">
+                <a:solidFill>
+                  <a:srgbClr val="E7F0F3"/>
+                </a:solidFill>
+                <a:latin typeface="Arial"/>
+              </a:rPr>
+              <a:t>−2σ/R = −14.4</a:t>
+            </a:r>
+          </a:p>
+        </p:txBody>
+      </p:sp>
+      <p:sp>
+        <p:nvSpPr>
+          <p:cNvPr id="35" name="C1-E06 rect 33" descr="sci-ppt:o033"/>
+          <p:cNvSpPr/>
+          <p:nvPr/>
+        </p:nvSpPr>
+        <p:spPr>
+          <a:xfrm>
+            <a:off x="8738920" y="2281558"/>
+            <a:ext cx="1198778" cy="56170"/>
+          </a:xfrm>
+          <a:prstGeom prst="rect">
+            <a:avLst/>
+          </a:prstGeom>
+          <a:solidFill>
+            <a:srgbClr val="7FC8F8">
+              <a:alpha val="85000"/>
+            </a:srgbClr>
+          </a:solidFill>
+          <a:ln w="12700">
+            <a:solidFill>
+              <a:srgbClr val="7FC8F8">
+                <a:alpha val="85000"/>
+              </a:srgbClr>
+            </a:solidFill>
+          </a:ln>
+          <a:effectLst/>
+        </p:spPr>
+        <p:txBody>
+          <a:bodyPr rtlCol="0" anchor="ctr"/>
+          <a:lstStyle/>
+          <a:p>
+            <a:pPr algn="ctr"/>
+          </a:p>
+        </p:txBody>
+      </p:sp>
+      <p:sp>
+        <p:nvSpPr>
+          <p:cNvPr id="36" name="C1-E06 text 34" descr="sci-ppt:o034"/>
+          <p:cNvSpPr txBox="1"/>
+          <p:nvPr/>
+        </p:nvSpPr>
+        <p:spPr>
+          <a:xfrm>
+            <a:off x="8464600" y="1988950"/>
+            <a:ext cx="1280160" cy="223900"/>
+          </a:xfrm>
+          <a:prstGeom prst="rect">
+            <a:avLst/>
+          </a:prstGeom>
+          <a:noFill/>
+          <a:effectLst/>
+        </p:spPr>
+        <p:txBody>
+          <a:bodyPr wrap="none" lIns="18288" rIns="18288" tIns="18288" bIns="18288" anchor="t">
+            <a:spAutoFit/>
+          </a:bodyPr>
+          <a:lstStyle/>
+          <a:p>
+            <a:pPr algn="ctr">
+              <a:spcAft>
+                <a:spcPts val="0"/>
+              </a:spcAft>
+            </a:pPr>
+            <a:r>
+              <a:rPr sz="1150" b="0" i="0">
+                <a:solidFill>
+                  <a:srgbClr val="E7F0F3"/>
+                </a:solidFill>
+                <a:latin typeface="Arial"/>
+              </a:rPr>
+              <a:t>−4μṘ/R = +2.0</a:t>
+            </a:r>
+          </a:p>
+        </p:txBody>
+      </p:sp>
+      <p:sp>
+        <p:nvSpPr>
+          <p:cNvPr id="37" name="C1-E06 rect 35" descr="sci-ppt:o035"/>
+          <p:cNvSpPr/>
+          <p:nvPr/>
+        </p:nvSpPr>
+        <p:spPr>
+          <a:xfrm>
+            <a:off x="10316260" y="2281558"/>
+            <a:ext cx="1198778" cy="3021961"/>
+          </a:xfrm>
+          <a:prstGeom prst="rect">
+            <a:avLst/>
+          </a:prstGeom>
+          <a:solidFill>
+            <a:srgbClr val="8EDBD4">
+              <a:alpha val="85000"/>
+            </a:srgbClr>
+          </a:solidFill>
+          <a:ln w="12700">
+            <a:solidFill>
+              <a:srgbClr val="8EDBD4">
+                <a:alpha val="85000"/>
+              </a:srgbClr>
+            </a:solidFill>
+          </a:ln>
+          <a:effectLst/>
+        </p:spPr>
+        <p:txBody>
+          <a:bodyPr rtlCol="0" anchor="ctr"/>
+          <a:lstStyle/>
+          <a:p>
+            <a:pPr algn="ctr"/>
+          </a:p>
+        </p:txBody>
+      </p:sp>
+      <p:sp>
+        <p:nvSpPr>
+          <p:cNvPr id="38" name="C1-E06 text 36" descr="sci-ppt:o036"/>
+          <p:cNvSpPr txBox="1"/>
+          <p:nvPr/>
+        </p:nvSpPr>
+        <p:spPr>
+          <a:xfrm>
+            <a:off x="10041940" y="1988950"/>
+            <a:ext cx="1280160" cy="223900"/>
+          </a:xfrm>
+          <a:prstGeom prst="rect">
+            <a:avLst/>
+          </a:prstGeom>
+          <a:noFill/>
+          <a:effectLst/>
+        </p:spPr>
+        <p:txBody>
+          <a:bodyPr wrap="none" lIns="18288" rIns="18288" tIns="18288" bIns="18288" anchor="t">
+            <a:spAutoFit/>
+          </a:bodyPr>
+          <a:lstStyle/>
+          <a:p>
+            <a:pPr algn="ctr">
+              <a:spcAft>
+                <a:spcPts val="0"/>
+              </a:spcAft>
+            </a:pPr>
+            <a:r>
+              <a:rPr sz="1150" b="0" i="0">
+                <a:solidFill>
+                  <a:srgbClr val="E7F0F3"/>
+                </a:solidFill>
+                <a:latin typeface="Arial"/>
+              </a:rPr>
+              <a:t>pₗ = 107.6</a:t>
+            </a:r>
+          </a:p>
+        </p:txBody>
+      </p:sp>
+      <p:sp>
+        <p:nvSpPr>
+          <p:cNvPr id="39" name="C1-E06 text 37" descr="sci-ppt:o037"/>
+          <p:cNvSpPr txBox="1"/>
+          <p:nvPr/>
+        </p:nvSpPr>
+        <p:spPr>
+          <a:xfrm>
+            <a:off x="5394960" y="5669280"/>
+            <a:ext cx="6309360" cy="223900"/>
+          </a:xfrm>
+          <a:prstGeom prst="rect">
+            <a:avLst/>
+          </a:prstGeom>
+          <a:noFill/>
+          <a:effectLst/>
+        </p:spPr>
+        <p:txBody>
+          <a:bodyPr wrap="none" lIns="18288" rIns="18288" tIns="18288" bIns="18288" anchor="t">
             <a:spAutoFit/>
           </a:bodyPr>
           <a:lstStyle/>
@@ -3301,27 +4377,27 @@
               </a:spcAft>
             </a:pPr>
             <a:r>
-              <a:rPr sz="2111" b="0" i="0">
+              <a:rPr sz="1150" b="0" i="0">
                 <a:solidFill>
-                  <a:srgbClr val="E7F0F3"/>
+                  <a:srgbClr val="B4C7D2"/>
                 </a:solidFill>
                 <a:latin typeface="Arial"/>
               </a:rPr>
-              <a:t>Surrounding liquid</a:t>
-            </a:r>
-          </a:p>
-        </p:txBody>
-      </p:sp>
-      <p:sp>
-        <p:nvSpPr>
-          <p:cNvPr id="8" name="text7" descr="sci-ppt:C1-E06-007"/>
+              <a:t>R = 10 µm, σ = 0.072 N/m, μ = 1 mPa·s, Ṙ = −5 m/s, p_b = 120 kPa</a:t>
+            </a:r>
+          </a:p>
+        </p:txBody>
+      </p:sp>
+      <p:sp>
+        <p:nvSpPr>
+          <p:cNvPr id="40" name="C1-E06 text 38" descr="sci-ppt:o038"/>
           <p:cNvSpPr txBox="1"/>
           <p:nvPr/>
         </p:nvSpPr>
         <p:spPr>
           <a:xfrm>
-            <a:off x="5242560" y="1987296"/>
-            <a:ext cx="5852160" cy="359054"/>
+            <a:off x="5394960" y="5989320"/>
+            <a:ext cx="6309360" cy="247142"/>
           </a:xfrm>
           <a:prstGeom prst="rect">
             <a:avLst/>
@@ -3330,7 +4406,7 @@
           <a:effectLst/>
         </p:spPr>
         <p:txBody>
-          <a:bodyPr wrap="none" lIns="27432" rIns="27432" tIns="18288" bIns="18288" anchor="ctr">
+          <a:bodyPr wrap="none" lIns="18288" rIns="18288" tIns="18288" bIns="18288" anchor="t">
             <a:spAutoFit/>
           </a:bodyPr>
           <a:lstStyle/>
@@ -3341,51 +4417,27 @@
               </a:spcAft>
             </a:pPr>
             <a:r>
-              <a:rPr sz="1823" b="0" i="0">
+              <a:rPr sz="1300" b="0" i="0">
                 <a:solidFill>
-                  <a:srgbClr val="E7F0F3"/>
+                  <a:srgbClr val="F2B880"/>
                 </a:solidFill>
                 <a:latin typeface="Arial"/>
               </a:rPr>
-              <a:t>p∞, ρ, μ; interface: σ</a:t>
-            </a:r>
-          </a:p>
-        </p:txBody>
-      </p:sp>
-      <p:cxnSp>
-        <p:nvCxnSpPr>
-          <p:cNvPr id="9" name="arrow8" descr="sci-ppt:C1-E06-008"/>
-          <p:cNvCxnSpPr/>
-          <p:nvPr/>
-        </p:nvCxnSpPr>
-        <p:spPr>
-          <a:xfrm>
-            <a:off x="3291840" y="2621280"/>
-            <a:ext cx="1706880" cy="1158240"/>
-          </a:xfrm>
-          <a:prstGeom prst="line">
-            <a:avLst/>
-          </a:prstGeom>
-          <a:ln w="25400">
-            <a:solidFill>
-              <a:srgbClr val="8EDBD4"/>
-            </a:solidFill>
-            <a:headEnd type="none" w="med" len="med"/>
-            <a:tailEnd type="triangle" w="med" len="med"/>
-          </a:ln>
-          <a:effectLst/>
-        </p:spPr>
-      </p:cxnSp>
-      <p:sp>
-        <p:nvSpPr>
-          <p:cNvPr id="10" name="text9" descr="sci-ppt:C1-E06-009"/>
+              <a:t>Inward motion makes the viscous term raise pₗ; tension always lowers it.</a:t>
+            </a:r>
+          </a:p>
+        </p:txBody>
+      </p:sp>
+      <p:sp>
+        <p:nvSpPr>
+          <p:cNvPr id="41" name="C1-E06 text 39" descr="sci-ppt:o039"/>
           <p:cNvSpPr txBox="1"/>
           <p:nvPr/>
         </p:nvSpPr>
         <p:spPr>
           <a:xfrm>
-            <a:off x="5364480" y="3657600"/>
-            <a:ext cx="1950720" cy="340156"/>
+            <a:off x="320040" y="6510528"/>
+            <a:ext cx="11521440" cy="200660"/>
           </a:xfrm>
           <a:prstGeom prst="rect">
             <a:avLst/>
@@ -3394,7 +4446,7 @@
           <a:effectLst/>
         </p:spPr>
         <p:txBody>
-          <a:bodyPr wrap="none" lIns="27432" rIns="27432" tIns="18288" bIns="18288" anchor="ctr">
+          <a:bodyPr wrap="none" lIns="18288" rIns="18288" tIns="18288" bIns="18288" anchor="t">
             <a:spAutoFit/>
           </a:bodyPr>
           <a:lstStyle/>
@@ -3405,557 +4457,13 @@
               </a:spcAft>
             </a:pPr>
             <a:r>
-              <a:rPr sz="1728" b="0" i="0">
-                <a:solidFill>
-                  <a:srgbClr val="E7F0F3"/>
-                </a:solidFill>
-                <a:latin typeface="Arial"/>
-              </a:rPr>
-              <a:t>r ≥ R</a:t>
-            </a:r>
-          </a:p>
-        </p:txBody>
-      </p:sp>
-      <p:cxnSp>
-        <p:nvCxnSpPr>
-          <p:cNvPr id="11" name="arrow10" descr="sci-ppt:C1-E06-010"/>
-          <p:cNvCxnSpPr/>
-          <p:nvPr/>
-        </p:nvCxnSpPr>
-        <p:spPr>
-          <a:xfrm>
-            <a:off x="4998720" y="2621280"/>
-            <a:ext cx="792480" cy="0"/>
-          </a:xfrm>
-          <a:prstGeom prst="line">
-            <a:avLst/>
-          </a:prstGeom>
-          <a:ln w="25400">
-            <a:solidFill>
-              <a:srgbClr val="8EDBD4"/>
-            </a:solidFill>
-            <a:headEnd type="none" w="med" len="med"/>
-            <a:tailEnd type="triangle" w="med" len="med"/>
-          </a:ln>
-          <a:effectLst/>
-        </p:spPr>
-      </p:cxnSp>
-      <p:sp>
-        <p:nvSpPr>
-          <p:cNvPr id="12" name="text11" descr="sci-ppt:C1-E06-011"/>
-          <p:cNvSpPr txBox="1"/>
-          <p:nvPr/>
-        </p:nvSpPr>
-        <p:spPr>
-          <a:xfrm>
-            <a:off x="5059680" y="2865120"/>
-            <a:ext cx="3291840" cy="321259"/>
-          </a:xfrm>
-          <a:prstGeom prst="rect">
-            <a:avLst/>
-          </a:prstGeom>
-          <a:noFill/>
-          <a:effectLst/>
-        </p:spPr>
-        <p:txBody>
-          <a:bodyPr wrap="none" lIns="27432" rIns="27432" tIns="18288" bIns="18288" anchor="ctr">
-            <a:spAutoFit/>
-          </a:bodyPr>
-          <a:lstStyle/>
-          <a:p>
-            <a:pPr algn="l">
-              <a:spcAft>
-                <a:spcPts val="0"/>
-              </a:spcAft>
-            </a:pPr>
-            <a:r>
-              <a:rPr sz="1632" b="0" i="0">
-                <a:solidFill>
-                  <a:srgbClr val="E7F0F3"/>
-                </a:solidFill>
-                <a:latin typeface="Arial"/>
-              </a:rPr>
-              <a:t>+e_r (coordinate)</a:t>
-            </a:r>
-          </a:p>
-        </p:txBody>
-      </p:sp>
-      <p:sp>
-        <p:nvSpPr>
-          <p:cNvPr id="13" name="text12" descr="sci-ppt:C1-E06-012"/>
-          <p:cNvSpPr txBox="1"/>
-          <p:nvPr/>
-        </p:nvSpPr>
-        <p:spPr>
-          <a:xfrm>
-            <a:off x="1219200" y="4206240"/>
-            <a:ext cx="9753600" cy="340156"/>
-          </a:xfrm>
-          <a:prstGeom prst="rect">
-            <a:avLst/>
-          </a:prstGeom>
-          <a:noFill/>
-          <a:effectLst/>
-        </p:spPr>
-        <p:txBody>
-          <a:bodyPr wrap="none" lIns="27432" rIns="27432" tIns="18288" bIns="18288" anchor="ctr">
-            <a:spAutoFit/>
-          </a:bodyPr>
-          <a:lstStyle/>
-          <a:p>
-            <a:pPr algn="l">
-              <a:spcAft>
-                <a:spcPts val="0"/>
-              </a:spcAft>
-            </a:pPr>
-            <a:r>
-              <a:rPr sz="1728" b="0" i="0">
-                <a:solidFill>
-                  <a:srgbClr val="E7F0F3"/>
-                </a:solidFill>
-                <a:latin typeface="Arial"/>
-              </a:rPr>
-              <a:t>Signed wall speed: Ṙ; acceleration: R̈</a:t>
-            </a:r>
-          </a:p>
-        </p:txBody>
-      </p:sp>
-      <p:sp>
-        <p:nvSpPr>
-          <p:cNvPr id="14" name="text13" descr="sci-ppt:C1-E06-013"/>
-          <p:cNvSpPr txBox="1"/>
-          <p:nvPr/>
-        </p:nvSpPr>
-        <p:spPr>
-          <a:xfrm>
-            <a:off x="5486400" y="3352800"/>
-            <a:ext cx="5730240" cy="340156"/>
-          </a:xfrm>
-          <a:prstGeom prst="rect">
-            <a:avLst/>
-          </a:prstGeom>
-          <a:noFill/>
-          <a:effectLst/>
-        </p:spPr>
-        <p:txBody>
-          <a:bodyPr wrap="none" lIns="27432" rIns="27432" tIns="18288" bIns="18288" anchor="ctr">
-            <a:spAutoFit/>
-          </a:bodyPr>
-          <a:lstStyle/>
-          <a:p>
-            <a:pPr algn="l">
-              <a:spcAft>
-                <a:spcPts val="0"/>
-              </a:spcAft>
-            </a:pPr>
-            <a:r>
-              <a:rPr sz="1728" b="0" i="0">
-                <a:solidFill>
-                  <a:srgbClr val="E7F0F3"/>
-                </a:solidFill>
-                <a:latin typeface="Arial"/>
-              </a:rPr>
-              <a:t>p_l = p_b - 2σ/R - 4μ(Ṙ)/R</a:t>
-            </a:r>
-          </a:p>
-        </p:txBody>
-      </p:sp>
-      <p:sp>
-        <p:nvSpPr>
-          <p:cNvPr id="15" name="text14" descr="sci-ppt:C1-E06-014"/>
-          <p:cNvSpPr txBox="1"/>
-          <p:nvPr/>
-        </p:nvSpPr>
-        <p:spPr>
-          <a:xfrm>
-            <a:off x="365760" y="4974336"/>
-            <a:ext cx="5547360" cy="321259"/>
-          </a:xfrm>
-          <a:prstGeom prst="rect">
-            <a:avLst/>
-          </a:prstGeom>
-          <a:noFill/>
-          <a:effectLst/>
-        </p:spPr>
-        <p:txBody>
-          <a:bodyPr wrap="none" lIns="27432" rIns="27432" tIns="18288" bIns="18288" anchor="ctr">
-            <a:spAutoFit/>
-          </a:bodyPr>
-          <a:lstStyle/>
-          <a:p>
-            <a:pPr algn="l">
-              <a:spcAft>
-                <a:spcPts val="0"/>
-              </a:spcAft>
-            </a:pPr>
-            <a:r>
-              <a:rPr sz="1632" b="0" i="0">
-                <a:solidFill>
-                  <a:srgbClr val="E7F0F3"/>
-                </a:solidFill>
-                <a:latin typeface="Arial"/>
-              </a:rPr>
-              <a:t>pb inside</a:t>
-            </a:r>
-          </a:p>
-        </p:txBody>
-      </p:sp>
-      <p:sp>
-        <p:nvSpPr>
-          <p:cNvPr id="16" name="text15" descr="sci-ppt:C1-E06-015"/>
-          <p:cNvSpPr txBox="1"/>
-          <p:nvPr/>
-        </p:nvSpPr>
-        <p:spPr>
-          <a:xfrm>
-            <a:off x="365760" y="5266944"/>
-            <a:ext cx="5547360" cy="321259"/>
-          </a:xfrm>
-          <a:prstGeom prst="rect">
-            <a:avLst/>
-          </a:prstGeom>
-          <a:noFill/>
-          <a:effectLst/>
-        </p:spPr>
-        <p:txBody>
-          <a:bodyPr wrap="none" lIns="27432" rIns="27432" tIns="18288" bIns="18288" anchor="ctr">
-            <a:spAutoFit/>
-          </a:bodyPr>
-          <a:lstStyle/>
-          <a:p>
-            <a:pPr algn="l">
-              <a:spcAft>
-                <a:spcPts val="0"/>
-              </a:spcAft>
-            </a:pPr>
-            <a:r>
-              <a:rPr sz="1632" b="0" i="0">
-                <a:solidFill>
-                  <a:srgbClr val="E7F0F3"/>
-                </a:solidFill>
-                <a:latin typeface="Arial"/>
-              </a:rPr>
-              <a:t>R</a:t>
-            </a:r>
-          </a:p>
-        </p:txBody>
-      </p:sp>
-      <p:sp>
-        <p:nvSpPr>
-          <p:cNvPr id="17" name="text16" descr="sci-ppt:C1-E06-016"/>
-          <p:cNvSpPr txBox="1"/>
-          <p:nvPr/>
-        </p:nvSpPr>
-        <p:spPr>
-          <a:xfrm>
-            <a:off x="365760" y="5559552"/>
-            <a:ext cx="5547360" cy="321259"/>
-          </a:xfrm>
-          <a:prstGeom prst="rect">
-            <a:avLst/>
-          </a:prstGeom>
-          <a:noFill/>
-          <a:effectLst/>
-        </p:spPr>
-        <p:txBody>
-          <a:bodyPr wrap="none" lIns="27432" rIns="27432" tIns="18288" bIns="18288" anchor="ctr">
-            <a:spAutoFit/>
-          </a:bodyPr>
-          <a:lstStyle/>
-          <a:p>
-            <a:pPr algn="l">
-              <a:spcAft>
-                <a:spcPts val="0"/>
-              </a:spcAft>
-            </a:pPr>
-            <a:r>
-              <a:rPr sz="1632" b="0" i="0">
-                <a:solidFill>
-                  <a:srgbClr val="E7F0F3"/>
-                </a:solidFill>
-                <a:latin typeface="Arial"/>
-              </a:rPr>
-              <a:t>u</a:t>
-            </a:r>
-          </a:p>
-        </p:txBody>
-      </p:sp>
-      <p:sp>
-        <p:nvSpPr>
-          <p:cNvPr id="18" name="text17" descr="sci-ppt:C1-E06-017"/>
-          <p:cNvSpPr txBox="1"/>
-          <p:nvPr/>
-        </p:nvSpPr>
-        <p:spPr>
-          <a:xfrm>
-            <a:off x="365760" y="5852160"/>
-            <a:ext cx="5547360" cy="321259"/>
-          </a:xfrm>
-          <a:prstGeom prst="rect">
-            <a:avLst/>
-          </a:prstGeom>
-          <a:noFill/>
-          <a:effectLst/>
-        </p:spPr>
-        <p:txBody>
-          <a:bodyPr wrap="none" lIns="27432" rIns="27432" tIns="18288" bIns="18288" anchor="ctr">
-            <a:spAutoFit/>
-          </a:bodyPr>
-          <a:lstStyle/>
-          <a:p>
-            <a:pPr algn="l">
-              <a:spcAft>
-                <a:spcPts val="0"/>
-              </a:spcAft>
-            </a:pPr>
-            <a:r>
-              <a:rPr sz="1632" b="0" i="0">
-                <a:solidFill>
-                  <a:srgbClr val="E7F0F3"/>
-                </a:solidFill>
-                <a:latin typeface="Arial"/>
-              </a:rPr>
-              <a:t>2σ/R</a:t>
-            </a:r>
-          </a:p>
-        </p:txBody>
-      </p:sp>
-      <p:sp>
-        <p:nvSpPr>
-          <p:cNvPr id="19" name="text18" descr="sci-ppt:C1-E06-018"/>
-          <p:cNvSpPr txBox="1"/>
-          <p:nvPr/>
-        </p:nvSpPr>
-        <p:spPr>
-          <a:xfrm>
-            <a:off x="365760" y="6144768"/>
-            <a:ext cx="5547360" cy="321259"/>
-          </a:xfrm>
-          <a:prstGeom prst="rect">
-            <a:avLst/>
-          </a:prstGeom>
-          <a:noFill/>
-          <a:effectLst/>
-        </p:spPr>
-        <p:txBody>
-          <a:bodyPr wrap="none" lIns="27432" rIns="27432" tIns="18288" bIns="18288" anchor="ctr">
-            <a:spAutoFit/>
-          </a:bodyPr>
-          <a:lstStyle/>
-          <a:p>
-            <a:pPr algn="l">
-              <a:spcAft>
-                <a:spcPts val="0"/>
-              </a:spcAft>
-            </a:pPr>
-            <a:r>
-              <a:rPr sz="1632" b="0" i="0">
-                <a:solidFill>
-                  <a:srgbClr val="E7F0F3"/>
-                </a:solidFill>
-                <a:latin typeface="Arial"/>
-              </a:rPr>
-              <a:t>∂ru = −2Ṙ/R</a:t>
-            </a:r>
-          </a:p>
-        </p:txBody>
-      </p:sp>
-      <p:sp>
-        <p:nvSpPr>
-          <p:cNvPr id="20" name="text19" descr="sci-ppt:C1-E06-019"/>
-          <p:cNvSpPr txBox="1"/>
-          <p:nvPr/>
-        </p:nvSpPr>
-        <p:spPr>
-          <a:xfrm>
-            <a:off x="6156960" y="4974336"/>
-            <a:ext cx="5547360" cy="321259"/>
-          </a:xfrm>
-          <a:prstGeom prst="rect">
-            <a:avLst/>
-          </a:prstGeom>
-          <a:noFill/>
-          <a:effectLst/>
-        </p:spPr>
-        <p:txBody>
-          <a:bodyPr wrap="none" lIns="27432" rIns="27432" tIns="18288" bIns="18288" anchor="ctr">
-            <a:spAutoFit/>
-          </a:bodyPr>
-          <a:lstStyle/>
-          <a:p>
-            <a:pPr algn="l">
-              <a:spcAft>
-                <a:spcPts val="0"/>
-              </a:spcAft>
-            </a:pPr>
-            <a:r>
-              <a:rPr sz="1632" b="0" i="0">
-                <a:solidFill>
-                  <a:srgbClr val="E7F0F3"/>
-                </a:solidFill>
-                <a:latin typeface="Arial"/>
-              </a:rPr>
-              <a:t>pl outside</a:t>
-            </a:r>
-          </a:p>
-        </p:txBody>
-      </p:sp>
-      <p:sp>
-        <p:nvSpPr>
-          <p:cNvPr id="21" name="text20" descr="sci-ppt:C1-E06-020"/>
-          <p:cNvSpPr txBox="1"/>
-          <p:nvPr/>
-        </p:nvSpPr>
-        <p:spPr>
-          <a:xfrm>
-            <a:off x="6156960" y="5266944"/>
-            <a:ext cx="5547360" cy="321259"/>
-          </a:xfrm>
-          <a:prstGeom prst="rect">
-            <a:avLst/>
-          </a:prstGeom>
-          <a:noFill/>
-          <a:effectLst/>
-        </p:spPr>
-        <p:txBody>
-          <a:bodyPr wrap="none" lIns="27432" rIns="27432" tIns="18288" bIns="18288" anchor="ctr">
-            <a:spAutoFit/>
-          </a:bodyPr>
-          <a:lstStyle/>
-          <a:p>
-            <a:pPr algn="l">
-              <a:spcAft>
-                <a:spcPts val="0"/>
-              </a:spcAft>
-            </a:pPr>
-            <a:r>
-              <a:rPr sz="1632" b="0" i="0">
-                <a:solidFill>
-                  <a:srgbClr val="E7F0F3"/>
-                </a:solidFill>
-                <a:latin typeface="Arial"/>
-              </a:rPr>
-              <a:t>r</a:t>
-            </a:r>
-          </a:p>
-        </p:txBody>
-      </p:sp>
-      <p:sp>
-        <p:nvSpPr>
-          <p:cNvPr id="22" name="text21" descr="sci-ppt:C1-E06-021"/>
-          <p:cNvSpPr txBox="1"/>
-          <p:nvPr/>
-        </p:nvSpPr>
-        <p:spPr>
-          <a:xfrm>
-            <a:off x="6156960" y="5559552"/>
-            <a:ext cx="5547360" cy="321259"/>
-          </a:xfrm>
-          <a:prstGeom prst="rect">
-            <a:avLst/>
-          </a:prstGeom>
-          <a:noFill/>
-          <a:effectLst/>
-        </p:spPr>
-        <p:txBody>
-          <a:bodyPr wrap="none" lIns="27432" rIns="27432" tIns="18288" bIns="18288" anchor="ctr">
-            <a:spAutoFit/>
-          </a:bodyPr>
-          <a:lstStyle/>
-          <a:p>
-            <a:pPr algn="l">
-              <a:spcAft>
-                <a:spcPts val="0"/>
-              </a:spcAft>
-            </a:pPr>
-            <a:r>
-              <a:rPr sz="1632" b="0" i="0">
-                <a:solidFill>
-                  <a:srgbClr val="E7F0F3"/>
-                </a:solidFill>
-                <a:latin typeface="Arial"/>
-              </a:rPr>
-              <a:t>Ṙ</a:t>
-            </a:r>
-          </a:p>
-        </p:txBody>
-      </p:sp>
-      <p:sp>
-        <p:nvSpPr>
-          <p:cNvPr id="23" name="text22" descr="sci-ppt:C1-E06-022"/>
-          <p:cNvSpPr txBox="1"/>
-          <p:nvPr/>
-        </p:nvSpPr>
-        <p:spPr>
-          <a:xfrm>
-            <a:off x="6156960" y="5852160"/>
-            <a:ext cx="5547360" cy="321259"/>
-          </a:xfrm>
-          <a:prstGeom prst="rect">
-            <a:avLst/>
-          </a:prstGeom>
-          <a:noFill/>
-          <a:effectLst/>
-        </p:spPr>
-        <p:txBody>
-          <a:bodyPr wrap="none" lIns="27432" rIns="27432" tIns="18288" bIns="18288" anchor="ctr">
-            <a:spAutoFit/>
-          </a:bodyPr>
-          <a:lstStyle/>
-          <a:p>
-            <a:pPr algn="l">
-              <a:spcAft>
-                <a:spcPts val="0"/>
-              </a:spcAft>
-            </a:pPr>
-            <a:r>
-              <a:rPr sz="1632" b="0" i="0">
-                <a:solidFill>
-                  <a:srgbClr val="E7F0F3"/>
-                </a:solidFill>
-                <a:latin typeface="Arial"/>
-              </a:rPr>
-              <a:t>4μṘ/R</a:t>
-            </a:r>
-          </a:p>
-        </p:txBody>
-      </p:sp>
-      <p:sp>
-        <p:nvSpPr>
-          <p:cNvPr id="24" name="text23" descr="sci-ppt:C1-E06-023"/>
-          <p:cNvSpPr txBox="1"/>
-          <p:nvPr/>
-        </p:nvSpPr>
-        <p:spPr>
-          <a:xfrm>
-            <a:off x="365760" y="6632448"/>
-            <a:ext cx="11277600" cy="302361"/>
-          </a:xfrm>
-          <a:prstGeom prst="rect">
-            <a:avLst/>
-          </a:prstGeom>
-          <a:noFill/>
-          <a:effectLst/>
-        </p:spPr>
-        <p:txBody>
-          <a:bodyPr wrap="none" lIns="27432" rIns="27432" tIns="18288" bIns="18288" anchor="ctr">
-            <a:spAutoFit/>
-          </a:bodyPr>
-          <a:lstStyle/>
-          <a:p>
-            <a:pPr algn="l">
-              <a:spcAft>
-                <a:spcPts val="0"/>
-              </a:spcAft>
-            </a:pPr>
-            <a:r>
-              <a:rPr sz="1536" b="0" i="0">
+              <a:rPr sz="1000" b="0" i="0">
                 <a:solidFill>
                   <a:srgbClr val="B4C7D2"/>
                 </a:solidFill>
                 <a:latin typeface="Arial"/>
               </a:rPr>
-              <a:t>Viscous stress changes sign when the wall reverses</a:t>
+              <a:t>Boundary condition pₗ = p_b − 2σ/R − 4μṘ/R (Eq. C1-E06); numbers computed from it.</a:t>
             </a:r>
           </a:p>
         </p:txBody>
